--- a/slides/03 - E3 - Cassandra Modellazione.pptx
+++ b/slides/03 - E3 - Cassandra Modellazione.pptx
@@ -255,7 +255,7 @@
           <a:p>
             <a:fld id="{8C81D565-392B-4AB9-9647-420EF17AA3FC}" type="datetimeFigureOut">
               <a:rPr lang="it-IT" smtClean="0"/>
-              <a:t>17/02/2023</a:t>
+              <a:t>05/03/2025</a:t>
             </a:fld>
             <a:endParaRPr lang="it-IT" dirty="0"/>
           </a:p>
@@ -1045,7 +1045,7 @@
           <a:p>
             <a:fld id="{65061730-2F0F-4B55-83F4-33856D80FFD7}" type="datetime1">
               <a:rPr lang="en-US" smtClean="0"/>
-              <a:t>2/17/2023</a:t>
+              <a:t>3/5/2025</a:t>
             </a:fld>
             <a:endParaRPr lang="en-US" dirty="0"/>
           </a:p>
@@ -1253,7 +1253,7 @@
           <a:p>
             <a:fld id="{BE1035D6-F845-4530-B289-DD4EC9CAE501}" type="datetime1">
               <a:rPr lang="en-US" smtClean="0"/>
-              <a:t>2/17/2023</a:t>
+              <a:t>3/5/2025</a:t>
             </a:fld>
             <a:endParaRPr lang="en-US" dirty="0"/>
           </a:p>
@@ -1509,7 +1509,7 @@
           <a:p>
             <a:fld id="{EDD3DE46-844C-40F1-AAA7-78AD6518D44C}" type="datetime1">
               <a:rPr lang="en-US" smtClean="0"/>
-              <a:t>2/17/2023</a:t>
+              <a:t>3/5/2025</a:t>
             </a:fld>
             <a:endParaRPr lang="en-US" dirty="0"/>
           </a:p>
@@ -1681,7 +1681,7 @@
           <a:p>
             <a:fld id="{1FCF7768-7A83-43C9-9C3D-95CD5F68D7E2}" type="datetime1">
               <a:rPr lang="en-US" smtClean="0"/>
-              <a:t>2/17/2023</a:t>
+              <a:t>3/5/2025</a:t>
             </a:fld>
             <a:endParaRPr lang="en-US" dirty="0"/>
           </a:p>
@@ -2024,7 +2024,7 @@
           <a:p>
             <a:fld id="{58DD30C4-1715-4BC2-976F-EF7BA4DC70B4}" type="datetime1">
               <a:rPr lang="en-US" smtClean="0"/>
-              <a:t>2/17/2023</a:t>
+              <a:t>3/5/2025</a:t>
             </a:fld>
             <a:endParaRPr lang="en-US" dirty="0"/>
           </a:p>
@@ -2299,7 +2299,7 @@
           <a:p>
             <a:fld id="{E92CF10C-564E-48D4-BE3A-05BB93A7F107}" type="datetime1">
               <a:rPr lang="en-US" smtClean="0"/>
-              <a:t>2/17/2023</a:t>
+              <a:t>3/5/2025</a:t>
             </a:fld>
             <a:endParaRPr lang="en-US" dirty="0"/>
           </a:p>
@@ -2678,7 +2678,7 @@
           <a:p>
             <a:fld id="{CEF5B9DB-33AD-46E7-ADFD-C52815BFEA09}" type="datetime1">
               <a:rPr lang="en-US" smtClean="0"/>
-              <a:t>2/17/2023</a:t>
+              <a:t>3/5/2025</a:t>
             </a:fld>
             <a:endParaRPr lang="en-US" dirty="0"/>
           </a:p>
@@ -2796,7 +2796,7 @@
           <a:p>
             <a:fld id="{EFC02824-932F-46A1-8D0D-D52979BEE663}" type="datetime1">
               <a:rPr lang="en-US" smtClean="0"/>
-              <a:t>2/17/2023</a:t>
+              <a:t>3/5/2025</a:t>
             </a:fld>
             <a:endParaRPr lang="en-US" dirty="0"/>
           </a:p>
@@ -2967,7 +2967,7 @@
           <a:p>
             <a:fld id="{36233CB2-1968-4F08-9AB4-83693145DE18}" type="datetime1">
               <a:rPr lang="en-US" smtClean="0"/>
-              <a:t>2/17/2023</a:t>
+              <a:t>3/5/2025</a:t>
             </a:fld>
             <a:endParaRPr lang="en-US" dirty="0"/>
           </a:p>
@@ -3322,7 +3322,7 @@
           <a:p>
             <a:fld id="{F8F6D7E5-1322-4764-A2E4-7B71FFFDE726}" type="datetime1">
               <a:rPr lang="en-US" smtClean="0"/>
-              <a:t>2/17/2023</a:t>
+              <a:t>3/5/2025</a:t>
             </a:fld>
             <a:endParaRPr lang="en-US" dirty="0"/>
           </a:p>
@@ -3700,7 +3700,7 @@
           <a:p>
             <a:fld id="{E26D0A1A-929F-4DC6-9A8A-74A15252C912}" type="datetime1">
               <a:rPr lang="en-US" smtClean="0"/>
-              <a:t>2/17/2023</a:t>
+              <a:t>3/5/2025</a:t>
             </a:fld>
             <a:endParaRPr lang="en-US" dirty="0"/>
           </a:p>
@@ -3987,7 +3987,7 @@
           <a:p>
             <a:fld id="{EDD3DE46-844C-40F1-AAA7-78AD6518D44C}" type="datetime1">
               <a:rPr lang="en-US" smtClean="0"/>
-              <a:t>2/17/2023</a:t>
+              <a:t>3/5/2025</a:t>
             </a:fld>
             <a:endParaRPr lang="en-US" dirty="0"/>
           </a:p>
@@ -9971,15 +9971,7 @@
             <a:pPr lvl="1"/>
             <a:r>
               <a:rPr lang="en-US" dirty="0"/>
-              <a:t>Q1: </a:t>
-            </a:r>
-            <a:r>
-              <a:rPr lang="en-US" dirty="0" err="1"/>
-              <a:t>Dato</a:t>
-            </a:r>
-            <a:r>
-              <a:rPr lang="en-US" dirty="0"/>
-              <a:t> un tag, </a:t>
+              <a:t>Q1: Dato un tag, </a:t>
             </a:r>
             <a:r>
               <a:rPr lang="en-US" dirty="0" err="1"/>
@@ -9987,15 +9979,7 @@
             </a:r>
             <a:r>
               <a:rPr lang="en-US" dirty="0"/>
-              <a:t> </a:t>
-            </a:r>
-            <a:r>
-              <a:rPr lang="en-US" dirty="0" err="1"/>
-              <a:t>tutti</a:t>
-            </a:r>
-            <a:r>
-              <a:rPr lang="en-US" dirty="0"/>
-              <a:t> </a:t>
+              <a:t> tutti </a:t>
             </a:r>
             <a:r>
               <a:rPr lang="en-US" dirty="0" err="1"/>
@@ -10015,23 +9999,23 @@
             </a:r>
             <a:r>
               <a:rPr lang="en-US" dirty="0" err="1"/>
-              <a:t>i</a:t>
-            </a:r>
-            <a:r>
-              <a:rPr lang="en-US" dirty="0"/>
-              <a:t> </a:t>
-            </a:r>
-            <a:r>
-              <a:rPr lang="en-US" dirty="0" err="1"/>
-              <a:t>più</a:t>
-            </a:r>
-            <a:r>
-              <a:rPr lang="en-US" dirty="0"/>
-              <a:t> </a:t>
-            </a:r>
-            <a:r>
-              <a:rPr lang="en-US" dirty="0" err="1"/>
-              <a:t>recenti</a:t>
+              <a:t>gli</a:t>
+            </a:r>
+            <a:r>
+              <a:rPr lang="en-US" dirty="0"/>
+              <a:t> </a:t>
+            </a:r>
+            <a:r>
+              <a:rPr lang="en-US" dirty="0" err="1"/>
+              <a:t>ultimi</a:t>
+            </a:r>
+            <a:r>
+              <a:rPr lang="en-US" dirty="0"/>
+              <a:t> </a:t>
+            </a:r>
+            <a:r>
+              <a:rPr lang="en-US" dirty="0" err="1"/>
+              <a:t>caricati</a:t>
             </a:r>
             <a:r>
               <a:rPr lang="en-US" dirty="0"/>
@@ -11024,7 +11008,7 @@
                     <a:p>
                       <a:pPr algn="l" fontAlgn="b"/>
                       <a:r>
-                        <a:rPr lang="it-IT" sz="1600" b="1" i="0" u="none" strike="noStrike">
+                        <a:rPr lang="it-IT" sz="1600" b="1" i="0" u="none" strike="noStrike" dirty="0" err="1">
                           <a:solidFill>
                             <a:srgbClr val="BF8F00"/>
                           </a:solidFill>
@@ -11033,6 +11017,13 @@
                         </a:rPr>
                         <a:t>timestamp</a:t>
                       </a:r>
+                      <a:endParaRPr lang="it-IT" sz="1600" b="1" i="0" u="none" strike="noStrike" dirty="0">
+                        <a:solidFill>
+                          <a:srgbClr val="BF8F00"/>
+                        </a:solidFill>
+                        <a:effectLst/>
+                        <a:latin typeface="Calibri" panose="020F0502020204030204" pitchFamily="34" charset="0"/>
+                      </a:endParaRPr>
                     </a:p>
                   </a:txBody>
                   <a:tcPr marL="9525" marR="9525" marT="9525" marB="0" anchor="b">
